--- a/doc/Attention加速器IP汇报.pptx
+++ b/doc/Attention加速器IP汇报.pptx
@@ -2,22 +2,23 @@
 <file path=ppt/presentation.xml><?xml version="1.0" encoding="utf-8"?>
 <p:presentation xmlns:p="http://schemas.openxmlformats.org/presentationml/2006/main">
   <p:sldMasterIdLst>
-    <p:sldMasterId xmlns:r="http://schemas.openxmlformats.org/officeDocument/2006/relationships" id="2147483648" r:id="R8c33742ef8a94868"/>
+    <p:sldMasterId xmlns:r="http://schemas.openxmlformats.org/officeDocument/2006/relationships" id="2147483648" r:id="R76eab61f2f634250"/>
   </p:sldMasterIdLst>
   <p:notesMasterIdLst>
-    <p:notesMasterId xmlns:r="http://schemas.openxmlformats.org/officeDocument/2006/relationships" r:id="R01c2672119d340d1"/>
+    <p:notesMasterId xmlns:r="http://schemas.openxmlformats.org/officeDocument/2006/relationships" r:id="R1ef86ccab2784eb7"/>
   </p:notesMasterIdLst>
   <p:sldIdLst>
-    <p:sldId xmlns:r="http://schemas.openxmlformats.org/officeDocument/2006/relationships" id="256" r:id="R4eda1aab828b492c"/>
-    <p:sldId xmlns:r="http://schemas.openxmlformats.org/officeDocument/2006/relationships" id="257" r:id="Ra5eca8a892b84985"/>
-    <p:sldId xmlns:r="http://schemas.openxmlformats.org/officeDocument/2006/relationships" id="258" r:id="Rcc6b571b1f854228"/>
-    <p:sldId xmlns:r="http://schemas.openxmlformats.org/officeDocument/2006/relationships" id="259" r:id="Rd286e2f8aaa944e9"/>
-    <p:sldId xmlns:r="http://schemas.openxmlformats.org/officeDocument/2006/relationships" id="260" r:id="R69034bb43b1444f2"/>
-    <p:sldId xmlns:r="http://schemas.openxmlformats.org/officeDocument/2006/relationships" id="261" r:id="Rd4b51230b0e74286"/>
-    <p:sldId xmlns:r="http://schemas.openxmlformats.org/officeDocument/2006/relationships" id="262" r:id="R0ddec8898e9c4fa1"/>
-    <p:sldId xmlns:r="http://schemas.openxmlformats.org/officeDocument/2006/relationships" id="263" r:id="Rf7f7ee2dffa24b96"/>
-    <p:sldId xmlns:r="http://schemas.openxmlformats.org/officeDocument/2006/relationships" id="264" r:id="R7d534346c24649fc"/>
-    <p:sldId xmlns:r="http://schemas.openxmlformats.org/officeDocument/2006/relationships" id="265" r:id="Ra261bdee1b7346f7"/>
+    <p:sldId xmlns:r="http://schemas.openxmlformats.org/officeDocument/2006/relationships" id="256" r:id="R005a2c94d68548cc"/>
+    <p:sldId xmlns:r="http://schemas.openxmlformats.org/officeDocument/2006/relationships" id="257" r:id="R3c7b42fbfec64ab5"/>
+    <p:sldId xmlns:r="http://schemas.openxmlformats.org/officeDocument/2006/relationships" id="258" r:id="R8d32fec5b80d421b"/>
+    <p:sldId xmlns:r="http://schemas.openxmlformats.org/officeDocument/2006/relationships" id="259" r:id="Rc793067cdd844af3"/>
+    <p:sldId xmlns:r="http://schemas.openxmlformats.org/officeDocument/2006/relationships" id="260" r:id="Rf93e6d35d5e1489e"/>
+    <p:sldId xmlns:r="http://schemas.openxmlformats.org/officeDocument/2006/relationships" id="261" r:id="R22e88da6062041a8"/>
+    <p:sldId xmlns:r="http://schemas.openxmlformats.org/officeDocument/2006/relationships" id="262" r:id="Rb930d942f3aa4bee"/>
+    <p:sldId xmlns:r="http://schemas.openxmlformats.org/officeDocument/2006/relationships" id="263" r:id="R1ec7e777db8d4a66"/>
+    <p:sldId xmlns:r="http://schemas.openxmlformats.org/officeDocument/2006/relationships" id="264" r:id="Re6959ed93c57479c"/>
+    <p:sldId xmlns:r="http://schemas.openxmlformats.org/officeDocument/2006/relationships" id="265" r:id="R089aa81bb6dd4a41"/>
+    <p:sldId xmlns:r="http://schemas.openxmlformats.org/officeDocument/2006/relationships" id="266" r:id="R23ce1638c5a9489d"/>
   </p:sldIdLst>
   <p:sldSz cx="12192000" cy="6858000"/>
   <p:notesSz cx="6858000" cy="9144000"/>
@@ -551,6 +552,76 @@
 </p:notes>
 </file>
 
+<file path=ppt/notesSlides/notesSlide11.xml><?xml version="1.0" encoding="utf-8"?>
+<p:notes xmlns:p="http://schemas.openxmlformats.org/presentationml/2006/main">
+  <p:cSld>
+    <p:spTree>
+      <p:nvGrpSpPr>
+        <p:cNvPr id="1" name=""/>
+        <p:cNvGrpSpPr/>
+        <p:nvPr/>
+      </p:nvGrpSpPr>
+      <p:grpSpPr>
+        <a:xfrm xmlns:a="http://schemas.openxmlformats.org/drawingml/2006/main"/>
+      </p:grpSpPr>
+      <p:sp>
+        <p:nvSpPr>
+          <p:cNvPr id="2" name="Slide Image Placeholder 1"/>
+          <p:cNvSpPr>
+            <a:spLocks xmlns:a="http://schemas.openxmlformats.org/drawingml/2006/main" noGrp="1"/>
+          </p:cNvSpPr>
+          <p:nvPr>
+            <p:ph type="sldImg" idx="0"/>
+          </p:nvPr>
+        </p:nvSpPr>
+        <p:spPr/>
+      </p:sp>
+      <p:sp>
+        <p:nvSpPr>
+          <p:cNvPr id="3" name="Notes Placeholder 2"/>
+          <p:cNvSpPr>
+            <a:spLocks xmlns:a="http://schemas.openxmlformats.org/drawingml/2006/main" noGrp="1"/>
+          </p:cNvSpPr>
+          <p:nvPr>
+            <p:ph type="body" idx="1"/>
+          </p:nvPr>
+        </p:nvSpPr>
+        <p:spPr/>
+        <p:txBody>
+          <a:bodyPr xmlns:a="http://schemas.openxmlformats.org/drawingml/2006/main"/>
+          <a:lstStyle xmlns:a="http://schemas.openxmlformats.org/drawingml/2006/main"/>
+          <a:p xmlns:a="http://schemas.openxmlformats.org/drawingml/2006/main">
+            <a:r>
+              <a:t>加分项对应题目第十二节：A、B 属需独立测试的功能项，C 为参数化。A 的期望值由 model/attention_golden.py 带 pos 参数算出（sim/check_mask.py）；B 的资源代价是 +3 个 8×8 乘法器与 3 个 18 位加法器；C 的 S=4 实测为 125 拍，归一化仍为 72 拍（只与 d 有关），占比升到 58%。</a:t>
+            </a:r>
+          </a:p>
+        </p:txBody>
+      </p:sp>
+      <p:sp>
+        <p:nvSpPr>
+          <p:cNvPr id="4" name="Slide Number Placeholder 3"/>
+          <p:cNvSpPr>
+            <a:spLocks xmlns:a="http://schemas.openxmlformats.org/drawingml/2006/main" noGrp="1"/>
+          </p:cNvSpPr>
+          <p:nvPr>
+            <p:ph type="sldNum" idx="5"/>
+          </p:nvPr>
+        </p:nvSpPr>
+        <p:spPr/>
+        <p:txBody>
+          <a:bodyPr xmlns:a="http://schemas.openxmlformats.org/drawingml/2006/main"/>
+          <a:lstStyle xmlns:a="http://schemas.openxmlformats.org/drawingml/2006/main"/>
+          <a:p xmlns:a="http://schemas.openxmlformats.org/drawingml/2006/main"/>
+        </p:txBody>
+      </p:sp>
+    </p:spTree>
+  </p:cSld>
+  <p:clrMapOvr>
+    <a:masterClrMapping xmlns:a="http://schemas.openxmlformats.org/drawingml/2006/main"/>
+  </p:clrMapOvr>
+</p:notes>
+</file>
+
 <file path=ppt/notesSlides/notesSlide2.xml><?xml version="1.0" encoding="utf-8"?>
 <p:notes xmlns:p="http://schemas.openxmlformats.org/presentationml/2006/main">
   <p:cSld>
@@ -1149,7 +1220,7 @@
   </p:cSld>
   <p:clrMap bg1="lt1" tx1="dk1" bg2="lt2" tx2="dk2" accent1="accent1" accent2="accent2" accent3="accent3" accent4="accent4" accent5="accent5" accent6="accent6" hlink="hlink" folHlink="folHlink"/>
   <p:sldLayoutIdLst>
-    <p:sldLayoutId xmlns:r="http://schemas.openxmlformats.org/officeDocument/2006/relationships" id="2147483649" r:id="R02c46b3310894482"/>
+    <p:sldLayoutId xmlns:r="http://schemas.openxmlformats.org/officeDocument/2006/relationships" id="2147483649" r:id="R30dbba340c364111"/>
   </p:sldLayoutIdLst>
   <p:txStyles>
     <p:titleStyle>
@@ -1729,6 +1800,7 @@
           <a:lstStyle xmlns:a="http://schemas.openxmlformats.org/drawingml/2006/main"/>
           <a:p xmlns:a="http://schemas.openxmlformats.org/drawingml/2006/main">
             <a:pPr algn="l">
+              <a:buNone/>
               <a:defRPr sz="4050" b="1">
                 <a:solidFill>
                   <a:srgbClr val="1F4E79"/>
@@ -1786,6 +1858,7 @@
           <a:lstStyle xmlns:a="http://schemas.openxmlformats.org/drawingml/2006/main"/>
           <a:p xmlns:a="http://schemas.openxmlformats.org/drawingml/2006/main">
             <a:pPr algn="l">
+              <a:buNone/>
               <a:defRPr sz="1800" b="0">
                 <a:solidFill>
                   <a:srgbClr val="1A1A1A"/>
@@ -1843,6 +1916,7 @@
           <a:lstStyle xmlns:a="http://schemas.openxmlformats.org/drawingml/2006/main"/>
           <a:p xmlns:a="http://schemas.openxmlformats.org/drawingml/2006/main">
             <a:pPr algn="l">
+              <a:buNone/>
               <a:defRPr sz="1500" b="0">
                 <a:solidFill>
                   <a:srgbClr val="595959"/>
@@ -1922,6 +1996,7 @@
           <a:lstStyle xmlns:a="http://schemas.openxmlformats.org/drawingml/2006/main"/>
           <a:p xmlns:a="http://schemas.openxmlformats.org/drawingml/2006/main">
             <a:pPr algn="l">
+              <a:buNone/>
               <a:defRPr sz="2400" b="1">
                 <a:solidFill>
                   <a:srgbClr val="1F4E79"/>
@@ -1979,6 +2054,7 @@
           <a:lstStyle xmlns:a="http://schemas.openxmlformats.org/drawingml/2006/main"/>
           <a:p xmlns:a="http://schemas.openxmlformats.org/drawingml/2006/main">
             <a:pPr algn="l">
+              <a:buNone/>
               <a:defRPr sz="1500" b="0">
                 <a:solidFill>
                   <a:srgbClr val="1A1A1A"/>
@@ -2002,6 +2078,7 @@
           </a:p>
           <a:p xmlns:a="http://schemas.openxmlformats.org/drawingml/2006/main">
             <a:pPr algn="l">
+              <a:buNone/>
               <a:defRPr sz="1500" b="0">
                 <a:solidFill>
                   <a:srgbClr val="1A1A1A"/>
@@ -2025,6 +2102,7 @@
           </a:p>
           <a:p xmlns:a="http://schemas.openxmlformats.org/drawingml/2006/main">
             <a:pPr algn="l">
+              <a:buNone/>
               <a:defRPr sz="1500" b="0">
                 <a:solidFill>
                   <a:srgbClr val="1A1A1A"/>
@@ -2082,6 +2160,7 @@
           <a:lstStyle xmlns:a="http://schemas.openxmlformats.org/drawingml/2006/main"/>
           <a:p xmlns:a="http://schemas.openxmlformats.org/drawingml/2006/main">
             <a:pPr algn="l">
+              <a:buNone/>
               <a:defRPr sz="1800" b="1">
                 <a:solidFill>
                   <a:srgbClr val="1F4E79"/>
@@ -2139,6 +2218,7 @@
           <a:lstStyle xmlns:a="http://schemas.openxmlformats.org/drawingml/2006/main"/>
           <a:p xmlns:a="http://schemas.openxmlformats.org/drawingml/2006/main">
             <a:pPr algn="l">
+              <a:buNone/>
               <a:defRPr sz="1500" b="0">
                 <a:solidFill>
                   <a:srgbClr val="1A1A1A"/>
@@ -2166,6 +2246,518 @@
     <p:extLst>
       <p:ext uri="{BB962C8B-B14F-4D97-AF65-F5344CB8AC3E}">
         <p14:creationId xmlns:p14="http://schemas.microsoft.com/office/powerpoint/2010/main" val="520523018"/>
+      </p:ext>
+    </p:extLst>
+  </p:cSld>
+</p:sld>
+</file>
+
+<file path=ppt/slides/slide11.xml><?xml version="1.0" encoding="utf-8"?>
+<p:sld xmlns:p="http://schemas.openxmlformats.org/presentationml/2006/main">
+  <p:cSld>
+    <p:spTree>
+      <p:nvGrpSpPr>
+        <p:cNvPr id="1" name=""/>
+        <p:cNvGrpSpPr/>
+        <p:nvPr/>
+      </p:nvGrpSpPr>
+      <p:grpSpPr>
+        <a:xfrm xmlns:a="http://schemas.openxmlformats.org/drawingml/2006/main"/>
+      </p:grpSpPr>
+      <p:sp>
+        <p:nvSpPr>
+          <p:cNvPr id="5" name="">
+            <a:extLst xmlns:a="http://schemas.openxmlformats.org/drawingml/2006/main">
+              <a:ext uri="{FF2B5EF4-FFF2-40B4-BE49-F238E27FC236}">
+                <a16:creationId xmlns:a16="http://schemas.microsoft.com/office/drawing/2014/main" id="{E7EBD7D4-47A5-4254-98CA-F4A5B93C13FB}"/>
+              </a:ext>
+            </a:extLst>
+          </p:cNvPr>
+          <p:cNvSpPr>
+            <a:spLocks xmlns:a="http://schemas.openxmlformats.org/drawingml/2006/main" noGrp="1"/>
+          </p:cNvSpPr>
+          <p:nvPr/>
+        </p:nvSpPr>
+        <p:spPr>
+          <a:xfrm xmlns:a="http://schemas.openxmlformats.org/drawingml/2006/main">
+            <a:off x="685800" y="438150"/>
+            <a:ext cx="10820400" cy="495300"/>
+          </a:xfrm>
+          <a:prstGeom xmlns:a="http://schemas.openxmlformats.org/drawingml/2006/main" prst="rect">
+            <a:avLst/>
+          </a:prstGeom>
+          <a:noFill xmlns:a="http://schemas.openxmlformats.org/drawingml/2006/main"/>
+          <a:ln xmlns:a="http://schemas.openxmlformats.org/drawingml/2006/main" w="0">
+            <a:noFill/>
+          </a:ln>
+        </p:spPr>
+        <p:txBody>
+          <a:bodyPr xmlns:a="http://schemas.openxmlformats.org/drawingml/2006/main">
+            <a:noAutofit/>
+          </a:bodyPr>
+          <a:lstStyle xmlns:a="http://schemas.openxmlformats.org/drawingml/2006/main"/>
+          <a:p xmlns:a="http://schemas.openxmlformats.org/drawingml/2006/main">
+            <a:pPr algn="l">
+              <a:defRPr sz="2400" b="1">
+                <a:solidFill>
+                  <a:srgbClr val="1F4E79"/>
+                </a:solidFill>
+                <a:latin typeface="Microsoft YaHei"/>
+                <a:ea typeface="Microsoft YaHei"/>
+                <a:cs typeface="Microsoft YaHei"/>
+              </a:defRPr>
+            </a:pPr>
+            <a:r>
+              <a:rPr sz="2400" b="1">
+                <a:solidFill>
+                  <a:srgbClr val="1F4E79"/>
+                </a:solidFill>
+                <a:latin typeface="Microsoft YaHei"/>
+                <a:ea typeface="Microsoft YaHei"/>
+                <a:cs typeface="Microsoft YaHei"/>
+              </a:rPr>
+              <a:t>加分项实现与验证（A / B / C）</a:t>
+            </a:r>
+          </a:p>
+        </p:txBody>
+      </p:sp>
+      <p:graphicFrame>
+        <p:nvGraphicFramePr>
+          <p:cNvPr id="6" name=""/>
+          <p:cNvGraphicFramePr/>
+          <p:nvPr/>
+        </p:nvGraphicFramePr>
+        <p:xfrm>
+          <a:off xmlns:a="http://schemas.openxmlformats.org/drawingml/2006/main" x="685800" y="1428750"/>
+          <a:ext xmlns:a="http://schemas.openxmlformats.org/drawingml/2006/main" cx="10820400" cy="3238500"/>
+        </p:xfrm>
+        <a:graphic xmlns:a="http://schemas.openxmlformats.org/drawingml/2006/main">
+          <a:graphicData uri="http://schemas.openxmlformats.org/drawingml/2006/table">
+            <a:tbl>
+              <a:tblPr/>
+              <a:tblGrid>
+                <a:gridCol w="1905000"/>
+                <a:gridCol w="4476750"/>
+                <a:gridCol w="4438650"/>
+              </a:tblGrid>
+              <a:tr h="809625">
+                <a:tc>
+                  <a:txBody>
+                    <a:bodyPr/>
+                    <a:lstStyle/>
+                    <a:p>
+                      <a:r>
+                        <a:rPr sz="1275" b="1">
+                          <a:solidFill>
+                            <a:srgbClr val="FFFFFF"/>
+                          </a:solidFill>
+                          <a:latin typeface="Microsoft YaHei"/>
+                          <a:ea typeface="Microsoft YaHei"/>
+                          <a:cs typeface="Microsoft YaHei"/>
+                        </a:rPr>
+                        <a:t>加分项</a:t>
+                      </a:r>
+                    </a:p>
+                  </a:txBody>
+                  <a:tcPr marL="91440" marR="91440" marT="45720" marB="45720">
+                    <a:solidFill>
+                      <a:srgbClr val="1F4E79"/>
+                    </a:solidFill>
+                  </a:tcPr>
+                </a:tc>
+                <a:tc>
+                  <a:txBody>
+                    <a:bodyPr/>
+                    <a:lstStyle/>
+                    <a:p>
+                      <a:r>
+                        <a:rPr sz="1275" b="1">
+                          <a:solidFill>
+                            <a:srgbClr val="FFFFFF"/>
+                          </a:solidFill>
+                          <a:latin typeface="Microsoft YaHei"/>
+                          <a:ea typeface="Microsoft YaHei"/>
+                          <a:cs typeface="Microsoft YaHei"/>
+                        </a:rPr>
+                        <a:t>做法</a:t>
+                      </a:r>
+                    </a:p>
+                  </a:txBody>
+                  <a:tcPr marL="91440" marR="91440" marT="45720" marB="45720">
+                    <a:solidFill>
+                      <a:srgbClr val="1F4E79"/>
+                    </a:solidFill>
+                  </a:tcPr>
+                </a:tc>
+                <a:tc>
+                  <a:txBody>
+                    <a:bodyPr/>
+                    <a:lstStyle/>
+                    <a:p>
+                      <a:r>
+                        <a:rPr sz="1275" b="1">
+                          <a:solidFill>
+                            <a:srgbClr val="FFFFFF"/>
+                          </a:solidFill>
+                          <a:latin typeface="Microsoft YaHei"/>
+                          <a:ea typeface="Microsoft YaHei"/>
+                          <a:cs typeface="Microsoft YaHei"/>
+                        </a:rPr>
+                        <a:t>实测结果</a:t>
+                      </a:r>
+                    </a:p>
+                  </a:txBody>
+                  <a:tcPr marL="91440" marR="91440" marT="45720" marB="45720">
+                    <a:solidFill>
+                      <a:srgbClr val="1F4E79"/>
+                    </a:solidFill>
+                  </a:tcPr>
+                </a:tc>
+              </a:tr>
+              <a:tr h="809625">
+                <a:tc>
+                  <a:txBody>
+                    <a:bodyPr/>
+                    <a:lstStyle/>
+                    <a:p>
+                      <a:r>
+                        <a:rPr sz="1125">
+                          <a:solidFill>
+                            <a:srgbClr val="1A1A1A"/>
+                          </a:solidFill>
+                          <a:latin typeface="Microsoft YaHei"/>
+                          <a:ea typeface="Microsoft YaHei"/>
+                          <a:cs typeface="Microsoft YaHei"/>
+                        </a:rPr>
+                        <a:t>A 因果 Mask</a:t>
+                      </a:r>
+                    </a:p>
+                  </a:txBody>
+                  <a:tcPr marL="91440" marR="91440" marT="45720" marB="45720">
+                    <a:solidFill>
+                      <a:srgbClr val="FFFFFF"/>
+                    </a:solidFill>
+                  </a:tcPr>
+                </a:tc>
+                <a:tc>
+                  <a:txBody>
+                    <a:bodyPr/>
+                    <a:lstStyle/>
+                    <a:p>
+                      <a:r>
+                        <a:rPr sz="1125">
+                          <a:solidFill>
+                            <a:srgbClr val="1A1A1A"/>
+                          </a:solidFill>
+                          <a:latin typeface="Microsoft YaHei"/>
+                          <a:ea typeface="Microsoft YaHei"/>
+                          <a:cs typeface="Microsoft YaHei"/>
+                        </a:rPr>
+                        <a:t>新增 pos_i 输入与 MASK_EN 参数：j &gt; pos_i 的 Key 不参与 x_max、权重置 0、不进 L 与 ACC</a:t>
+                      </a:r>
+                    </a:p>
+                  </a:txBody>
+                  <a:tcPr marL="91440" marR="91440" marT="45720" marB="45720">
+                    <a:solidFill>
+                      <a:srgbClr val="FFFFFF"/>
+                    </a:solidFill>
+                  </a:tcPr>
+                </a:tc>
+                <a:tc>
+                  <a:txBody>
+                    <a:bodyPr/>
+                    <a:lstStyle/>
+                    <a:p>
+                      <a:r>
+                        <a:rPr sz="1125">
+                          <a:solidFill>
+                            <a:srgbClr val="1A1A1A"/>
+                          </a:solidFill>
+                          <a:latin typeface="Microsoft YaHei"/>
+                          <a:ea typeface="Microsoft YaHei"/>
+                          <a:cs typeface="Microsoft YaHei"/>
+                        </a:rPr>
+                        <a:t>独立测试 tb_attention_mask.sv：pos_i = 0/3/7 三组全过（O = [10,0,0,0] / [35,10,0,0] / [58,19,0,0]）</a:t>
+                      </a:r>
+                    </a:p>
+                  </a:txBody>
+                  <a:tcPr marL="91440" marR="91440" marT="45720" marB="45720">
+                    <a:solidFill>
+                      <a:srgbClr val="FFFFFF"/>
+                    </a:solidFill>
+                  </a:tcPr>
+                </a:tc>
+              </a:tr>
+              <a:tr h="809625">
+                <a:tc>
+                  <a:txBody>
+                    <a:bodyPr/>
+                    <a:lstStyle/>
+                    <a:p>
+                      <a:r>
+                        <a:rPr sz="1125">
+                          <a:solidFill>
+                            <a:srgbClr val="1A1A1A"/>
+                          </a:solidFill>
+                          <a:latin typeface="Microsoft YaHei"/>
+                          <a:ea typeface="Microsoft YaHei"/>
+                          <a:cs typeface="Microsoft YaHei"/>
+                        </a:rPr>
+                        <a:t>B 并行点积</a:t>
+                      </a:r>
+                    </a:p>
+                  </a:txBody>
+                  <a:tcPr marL="91440" marR="91440" marT="45720" marB="45720">
+                    <a:solidFill>
+                      <a:srgbClr val="EEF3F9"/>
+                    </a:solidFill>
+                  </a:tcPr>
+                </a:tc>
+                <a:tc>
+                  <a:txBody>
+                    <a:bodyPr/>
+                    <a:lstStyle/>
+                    <a:p>
+                      <a:r>
+                        <a:rPr sz="1125">
+                          <a:solidFill>
+                            <a:srgbClr val="1A1A1A"/>
+                          </a:solidFill>
+                          <a:latin typeface="Microsoft YaHei"/>
+                          <a:ea typeface="Microsoft YaHei"/>
+                          <a:cs typeface="Microsoft YaHei"/>
+                        </a:rPr>
+                        <a:t>新增 DOT_PAR 参数：D 个乘法器一拍算完一个 Score（点积 32 拍 → 8 拍）</a:t>
+                      </a:r>
+                    </a:p>
+                  </a:txBody>
+                  <a:tcPr marL="91440" marR="91440" marT="45720" marB="45720">
+                    <a:solidFill>
+                      <a:srgbClr val="EEF3F9"/>
+                    </a:solidFill>
+                  </a:tcPr>
+                </a:tc>
+                <a:tc>
+                  <a:txBody>
+                    <a:bodyPr/>
+                    <a:lstStyle/>
+                    <a:p>
+                      <a:r>
+                        <a:rPr sz="1125">
+                          <a:solidFill>
+                            <a:srgbClr val="1A1A1A"/>
+                          </a:solidFill>
+                          <a:latin typeface="Microsoft YaHei"/>
+                          <a:ea typeface="Microsoft YaHei"/>
+                          <a:cs typeface="Microsoft YaHei"/>
+                        </a:rPr>
+                        <a:t>周期 169 → 145 拍（−14%），41 例 + 409 例压力测试全过；代价 +3 个 8×8 乘法器</a:t>
+                      </a:r>
+                    </a:p>
+                  </a:txBody>
+                  <a:tcPr marL="91440" marR="91440" marT="45720" marB="45720">
+                    <a:solidFill>
+                      <a:srgbClr val="EEF3F9"/>
+                    </a:solidFill>
+                  </a:tcPr>
+                </a:tc>
+              </a:tr>
+              <a:tr h="809625">
+                <a:tc>
+                  <a:txBody>
+                    <a:bodyPr/>
+                    <a:lstStyle/>
+                    <a:p>
+                      <a:r>
+                        <a:rPr sz="1125">
+                          <a:solidFill>
+                            <a:srgbClr val="1A1A1A"/>
+                          </a:solidFill>
+                          <a:latin typeface="Microsoft YaHei"/>
+                          <a:ea typeface="Microsoft YaHei"/>
+                          <a:cs typeface="Microsoft YaHei"/>
+                        </a:rPr>
+                        <a:t>C 参数化</a:t>
+                      </a:r>
+                    </a:p>
+                  </a:txBody>
+                  <a:tcPr marL="91440" marR="91440" marT="45720" marB="45720">
+                    <a:solidFill>
+                      <a:srgbClr val="FFFFFF"/>
+                    </a:solidFill>
+                  </a:tcPr>
+                </a:tc>
+                <a:tc>
+                  <a:txBody>
+                    <a:bodyPr/>
+                    <a:lstStyle/>
+                    <a:p>
+                      <a:r>
+                        <a:rPr sz="1125">
+                          <a:solidFill>
+                            <a:srgbClr val="1A1A1A"/>
+                          </a:solidFill>
+                          <a:latin typeface="Microsoft YaHei"/>
+                          <a:ea typeface="Microsoft YaHei"/>
+                          <a:cs typeface="Microsoft YaHei"/>
+                        </a:rPr>
+                        <a:t>S / D / DW / W_FRAC 全参数化，计数器位宽由 $clog2 自动推导</a:t>
+                      </a:r>
+                    </a:p>
+                  </a:txBody>
+                  <a:tcPr marL="91440" marR="91440" marT="45720" marB="45720">
+                    <a:solidFill>
+                      <a:srgbClr val="FFFFFF"/>
+                    </a:solidFill>
+                  </a:tcPr>
+                </a:tc>
+                <a:tc>
+                  <a:txBody>
+                    <a:bodyPr/>
+                    <a:lstStyle/>
+                    <a:p>
+                      <a:r>
+                        <a:rPr sz="1125">
+                          <a:solidFill>
+                            <a:srgbClr val="1A1A1A"/>
+                          </a:solidFill>
+                          <a:latin typeface="Microsoft YaHei"/>
+                          <a:ea typeface="Microsoft YaHei"/>
+                          <a:cs typeface="Microsoft YaHei"/>
+                        </a:rPr>
+                        <a:t>S 改为 4：41/41 通过，周期 169 → 125 拍；归一化占比升到 58%</a:t>
+                      </a:r>
+                    </a:p>
+                  </a:txBody>
+                  <a:tcPr marL="91440" marR="91440" marT="45720" marB="45720">
+                    <a:solidFill>
+                      <a:srgbClr val="FFFFFF"/>
+                    </a:solidFill>
+                  </a:tcPr>
+                </a:tc>
+              </a:tr>
+            </a:tbl>
+          </a:graphicData>
+        </a:graphic>
+      </p:graphicFrame>
+      <p:sp>
+        <p:nvSpPr>
+          <p:cNvPr id="3" name="">
+            <a:extLst xmlns:a="http://schemas.openxmlformats.org/drawingml/2006/main">
+              <a:ext uri="{FF2B5EF4-FFF2-40B4-BE49-F238E27FC236}">
+                <a16:creationId xmlns:a16="http://schemas.microsoft.com/office/drawing/2014/main" id="{E57D65BD-0B08-4D74-9C32-08D091D5FEEF}"/>
+              </a:ext>
+            </a:extLst>
+          </p:cNvPr>
+          <p:cNvSpPr>
+            <a:spLocks xmlns:a="http://schemas.openxmlformats.org/drawingml/2006/main" noGrp="1"/>
+          </p:cNvSpPr>
+          <p:nvPr/>
+        </p:nvSpPr>
+        <p:spPr>
+          <a:xfrm xmlns:a="http://schemas.openxmlformats.org/drawingml/2006/main">
+            <a:off x="685800" y="4857750"/>
+            <a:ext cx="10820400" cy="381000"/>
+          </a:xfrm>
+          <a:prstGeom xmlns:a="http://schemas.openxmlformats.org/drawingml/2006/main" prst="rect">
+            <a:avLst/>
+          </a:prstGeom>
+          <a:noFill xmlns:a="http://schemas.openxmlformats.org/drawingml/2006/main"/>
+          <a:ln xmlns:a="http://schemas.openxmlformats.org/drawingml/2006/main" w="0">
+            <a:noFill/>
+          </a:ln>
+        </p:spPr>
+        <p:txBody>
+          <a:bodyPr xmlns:a="http://schemas.openxmlformats.org/drawingml/2006/main">
+            <a:noAutofit/>
+          </a:bodyPr>
+          <a:lstStyle xmlns:a="http://schemas.openxmlformats.org/drawingml/2006/main"/>
+          <a:p xmlns:a="http://schemas.openxmlformats.org/drawingml/2006/main">
+            <a:pPr algn="l">
+              <a:defRPr sz="1350" b="0">
+                <a:solidFill>
+                  <a:srgbClr val="1A1A1A"/>
+                </a:solidFill>
+                <a:latin typeface="Microsoft YaHei"/>
+                <a:ea typeface="Microsoft YaHei"/>
+                <a:cs typeface="Microsoft YaHei"/>
+              </a:defRPr>
+            </a:pPr>
+            <a:r>
+              <a:rPr sz="1350" b="0">
+                <a:solidFill>
+                  <a:srgbClr val="1A1A1A"/>
+                </a:solidFill>
+                <a:latin typeface="Microsoft YaHei"/>
+                <a:ea typeface="Microsoft YaHei"/>
+                <a:cs typeface="Microsoft YaHei"/>
+              </a:rPr>
+              <a:t>基础版默认参数不变（MASK_EN=0、DOT_PAR=1），基础功能零回归；41 + 409 例仍全部通过、169 拍。</a:t>
+            </a:r>
+          </a:p>
+        </p:txBody>
+      </p:sp>
+      <p:sp>
+        <p:nvSpPr>
+          <p:cNvPr id="4" name="">
+            <a:extLst xmlns:a="http://schemas.openxmlformats.org/drawingml/2006/main">
+              <a:ext uri="{FF2B5EF4-FFF2-40B4-BE49-F238E27FC236}">
+                <a16:creationId xmlns:a16="http://schemas.microsoft.com/office/drawing/2014/main" id="{06842F0D-9090-4342-BF0F-CD715B78834D}"/>
+              </a:ext>
+            </a:extLst>
+          </p:cNvPr>
+          <p:cNvSpPr>
+            <a:spLocks xmlns:a="http://schemas.openxmlformats.org/drawingml/2006/main" noGrp="1"/>
+          </p:cNvSpPr>
+          <p:nvPr/>
+        </p:nvSpPr>
+        <p:spPr>
+          <a:xfrm xmlns:a="http://schemas.openxmlformats.org/drawingml/2006/main">
+            <a:off x="685800" y="5295900"/>
+            <a:ext cx="10820400" cy="381000"/>
+          </a:xfrm>
+          <a:prstGeom xmlns:a="http://schemas.openxmlformats.org/drawingml/2006/main" prst="rect">
+            <a:avLst/>
+          </a:prstGeom>
+          <a:noFill xmlns:a="http://schemas.openxmlformats.org/drawingml/2006/main"/>
+          <a:ln xmlns:a="http://schemas.openxmlformats.org/drawingml/2006/main" w="0">
+            <a:noFill/>
+          </a:ln>
+        </p:spPr>
+        <p:txBody>
+          <a:bodyPr xmlns:a="http://schemas.openxmlformats.org/drawingml/2006/main">
+            <a:noAutofit/>
+          </a:bodyPr>
+          <a:lstStyle xmlns:a="http://schemas.openxmlformats.org/drawingml/2006/main"/>
+          <a:p xmlns:a="http://schemas.openxmlformats.org/drawingml/2006/main">
+            <a:pPr algn="l">
+              <a:defRPr sz="1200" b="0">
+                <a:solidFill>
+                  <a:srgbClr val="595959"/>
+                </a:solidFill>
+                <a:latin typeface="Microsoft YaHei"/>
+                <a:ea typeface="Microsoft YaHei"/>
+                <a:cs typeface="Microsoft YaHei"/>
+              </a:defRPr>
+            </a:pPr>
+            <a:r>
+              <a:rPr sz="1200" b="0">
+                <a:solidFill>
+                  <a:srgbClr val="595959"/>
+                </a:solidFill>
+                <a:latin typeface="Microsoft YaHei"/>
+                <a:ea typeface="Microsoft YaHei"/>
+                <a:cs typeface="Microsoft YaHei"/>
+              </a:rPr>
+              <a:t>复现：run_sim.ps1 -Mask（因果 Mask 独立测试）· run_sim.ps1 -DotPar 4（并行点积）· 改 S 后 run_sim.ps1（参数化）</a:t>
+            </a:r>
+          </a:p>
+        </p:txBody>
+      </p:sp>
+    </p:spTree>
+    <p:extLst>
+      <p:ext uri="{BB962C8B-B14F-4D97-AF65-F5344CB8AC3E}">
+        <p14:creationId xmlns:p14="http://schemas.microsoft.com/office/powerpoint/2010/main" val="1339762450"/>
       </p:ext>
     </p:extLst>
   </p:cSld>
@@ -2218,6 +2810,7 @@
           <a:lstStyle xmlns:a="http://schemas.openxmlformats.org/drawingml/2006/main"/>
           <a:p xmlns:a="http://schemas.openxmlformats.org/drawingml/2006/main">
             <a:pPr algn="l">
+              <a:buNone/>
               <a:defRPr sz="2400" b="1">
                 <a:solidFill>
                   <a:srgbClr val="1F4E79"/>
@@ -2275,6 +2868,7 @@
           <a:lstStyle xmlns:a="http://schemas.openxmlformats.org/drawingml/2006/main"/>
           <a:p xmlns:a="http://schemas.openxmlformats.org/drawingml/2006/main">
             <a:pPr algn="l">
+              <a:buNone/>
               <a:defRPr sz="1500" b="0">
                 <a:solidFill>
                   <a:srgbClr val="1A1A1A"/>
@@ -2332,6 +2926,7 @@
           <a:lstStyle xmlns:a="http://schemas.openxmlformats.org/drawingml/2006/main"/>
           <a:p xmlns:a="http://schemas.openxmlformats.org/drawingml/2006/main">
             <a:pPr algn="l">
+              <a:buNone/>
               <a:defRPr sz="1500" b="0">
                 <a:solidFill>
                   <a:srgbClr val="1A1A1A"/>
@@ -2355,6 +2950,7 @@
           </a:p>
           <a:p xmlns:a="http://schemas.openxmlformats.org/drawingml/2006/main">
             <a:pPr algn="l">
+              <a:buNone/>
               <a:defRPr sz="1500" b="0">
                 <a:solidFill>
                   <a:srgbClr val="1A1A1A"/>
@@ -2378,6 +2974,7 @@
           </a:p>
           <a:p xmlns:a="http://schemas.openxmlformats.org/drawingml/2006/main">
             <a:pPr algn="l">
+              <a:buNone/>
               <a:defRPr sz="1500" b="0">
                 <a:solidFill>
                   <a:srgbClr val="1A1A1A"/>
@@ -2435,6 +3032,7 @@
           <a:lstStyle xmlns:a="http://schemas.openxmlformats.org/drawingml/2006/main"/>
           <a:p xmlns:a="http://schemas.openxmlformats.org/drawingml/2006/main">
             <a:pPr algn="l">
+              <a:buNone/>
               <a:defRPr sz="4050" b="1">
                 <a:solidFill>
                   <a:srgbClr val="1F4E79"/>
@@ -2492,6 +3090,7 @@
           <a:lstStyle xmlns:a="http://schemas.openxmlformats.org/drawingml/2006/main"/>
           <a:p xmlns:a="http://schemas.openxmlformats.org/drawingml/2006/main">
             <a:pPr algn="l">
+              <a:buNone/>
               <a:defRPr sz="1275" b="0">
                 <a:solidFill>
                   <a:srgbClr val="595959"/>
@@ -2549,6 +3148,7 @@
           <a:lstStyle xmlns:a="http://schemas.openxmlformats.org/drawingml/2006/main"/>
           <a:p xmlns:a="http://schemas.openxmlformats.org/drawingml/2006/main">
             <a:pPr algn="l">
+              <a:buNone/>
               <a:defRPr sz="4050" b="1">
                 <a:solidFill>
                   <a:srgbClr val="1F4E79"/>
@@ -2606,6 +3206,7 @@
           <a:lstStyle xmlns:a="http://schemas.openxmlformats.org/drawingml/2006/main"/>
           <a:p xmlns:a="http://schemas.openxmlformats.org/drawingml/2006/main">
             <a:pPr algn="l">
+              <a:buNone/>
               <a:defRPr sz="1275" b="0">
                 <a:solidFill>
                   <a:srgbClr val="595959"/>
@@ -2663,6 +3264,7 @@
           <a:lstStyle xmlns:a="http://schemas.openxmlformats.org/drawingml/2006/main"/>
           <a:p xmlns:a="http://schemas.openxmlformats.org/drawingml/2006/main">
             <a:pPr algn="l">
+              <a:buNone/>
               <a:defRPr sz="4050" b="1">
                 <a:solidFill>
                   <a:srgbClr val="1F4E79"/>
@@ -2720,6 +3322,7 @@
           <a:lstStyle xmlns:a="http://schemas.openxmlformats.org/drawingml/2006/main"/>
           <a:p xmlns:a="http://schemas.openxmlformats.org/drawingml/2006/main">
             <a:pPr algn="l">
+              <a:buNone/>
               <a:defRPr sz="1275" b="0">
                 <a:solidFill>
                   <a:srgbClr val="595959"/>
@@ -2799,6 +3402,7 @@
           <a:lstStyle xmlns:a="http://schemas.openxmlformats.org/drawingml/2006/main"/>
           <a:p xmlns:a="http://schemas.openxmlformats.org/drawingml/2006/main">
             <a:pPr algn="l">
+              <a:buNone/>
               <a:defRPr sz="2400" b="1">
                 <a:solidFill>
                   <a:srgbClr val="1F4E79"/>
@@ -2856,6 +3460,7 @@
           <a:lstStyle xmlns:a="http://schemas.openxmlformats.org/drawingml/2006/main"/>
           <a:p xmlns:a="http://schemas.openxmlformats.org/drawingml/2006/main">
             <a:pPr algn="l">
+              <a:buNone/>
               <a:defRPr sz="1500" b="0">
                 <a:solidFill>
                   <a:srgbClr val="1A1A1A"/>
@@ -2879,6 +3484,7 @@
           </a:p>
           <a:p xmlns:a="http://schemas.openxmlformats.org/drawingml/2006/main">
             <a:pPr algn="l">
+              <a:buNone/>
               <a:defRPr sz="1500" b="0">
                 <a:solidFill>
                   <a:srgbClr val="1A1A1A"/>
@@ -2902,6 +3508,7 @@
           </a:p>
           <a:p xmlns:a="http://schemas.openxmlformats.org/drawingml/2006/main">
             <a:pPr algn="l">
+              <a:buNone/>
               <a:defRPr sz="1500" b="0">
                 <a:solidFill>
                   <a:srgbClr val="1A1A1A"/>
@@ -2925,6 +3532,7 @@
           </a:p>
           <a:p xmlns:a="http://schemas.openxmlformats.org/drawingml/2006/main">
             <a:pPr algn="l">
+              <a:buNone/>
               <a:defRPr sz="1500" b="0">
                 <a:solidFill>
                   <a:srgbClr val="1A1A1A"/>
@@ -2948,6 +3556,7 @@
           </a:p>
           <a:p xmlns:a="http://schemas.openxmlformats.org/drawingml/2006/main">
             <a:pPr algn="l">
+              <a:buNone/>
               <a:defRPr sz="1500" b="0">
                 <a:solidFill>
                   <a:srgbClr val="1A1A1A"/>
@@ -2971,6 +3580,7 @@
           </a:p>
           <a:p xmlns:a="http://schemas.openxmlformats.org/drawingml/2006/main">
             <a:pPr algn="l">
+              <a:buNone/>
               <a:defRPr sz="1500" b="0">
                 <a:solidFill>
                   <a:srgbClr val="1A1A1A"/>
@@ -3028,6 +3638,7 @@
           <a:lstStyle xmlns:a="http://schemas.openxmlformats.org/drawingml/2006/main"/>
           <a:p xmlns:a="http://schemas.openxmlformats.org/drawingml/2006/main">
             <a:pPr algn="l">
+              <a:buNone/>
               <a:defRPr sz="1500" b="1">
                 <a:solidFill>
                   <a:srgbClr val="1F4E79"/>
@@ -3085,6 +3696,7 @@
           <a:lstStyle xmlns:a="http://schemas.openxmlformats.org/drawingml/2006/main"/>
           <a:p xmlns:a="http://schemas.openxmlformats.org/drawingml/2006/main">
             <a:pPr algn="l">
+              <a:buNone/>
               <a:defRPr sz="1425" b="0">
                 <a:solidFill>
                   <a:srgbClr val="1A1A1A"/>
@@ -3108,6 +3720,7 @@
           </a:p>
           <a:p xmlns:a="http://schemas.openxmlformats.org/drawingml/2006/main">
             <a:pPr algn="l">
+              <a:buNone/>
               <a:defRPr sz="1425" b="0">
                 <a:solidFill>
                   <a:srgbClr val="1A1A1A"/>
@@ -3136,6 +3749,7 @@
           </a:p>
           <a:p xmlns:a="http://schemas.openxmlformats.org/drawingml/2006/main">
             <a:pPr algn="l">
+              <a:buNone/>
               <a:defRPr sz="1425" b="0">
                 <a:solidFill>
                   <a:srgbClr val="1A1A1A"/>
@@ -3159,6 +3773,7 @@
           </a:p>
           <a:p xmlns:a="http://schemas.openxmlformats.org/drawingml/2006/main">
             <a:pPr algn="l">
+              <a:buNone/>
               <a:defRPr sz="1425" b="0">
                 <a:solidFill>
                   <a:srgbClr val="1A1A1A"/>
@@ -3182,6 +3797,7 @@
           </a:p>
           <a:p xmlns:a="http://schemas.openxmlformats.org/drawingml/2006/main">
             <a:pPr algn="l">
+              <a:buNone/>
               <a:defRPr sz="1425" b="0">
                 <a:solidFill>
                   <a:srgbClr val="1A1A1A"/>
@@ -3205,6 +3821,7 @@
           </a:p>
           <a:p xmlns:a="http://schemas.openxmlformats.org/drawingml/2006/main">
             <a:pPr algn="l">
+              <a:buNone/>
               <a:defRPr sz="1425" b="0">
                 <a:solidFill>
                   <a:srgbClr val="1A1A1A"/>
@@ -3284,6 +3901,7 @@
           <a:lstStyle xmlns:a="http://schemas.openxmlformats.org/drawingml/2006/main"/>
           <a:p xmlns:a="http://schemas.openxmlformats.org/drawingml/2006/main">
             <a:pPr algn="l">
+              <a:buNone/>
               <a:defRPr sz="2400" b="1">
                 <a:solidFill>
                   <a:srgbClr val="1F4E79"/>
@@ -3346,6 +3964,7 @@
           <a:lstStyle xmlns:a="http://schemas.openxmlformats.org/drawingml/2006/main"/>
           <a:p xmlns:a="http://schemas.openxmlformats.org/drawingml/2006/main">
             <a:pPr algn="ctr">
+              <a:buNone/>
               <a:defRPr sz="1275" b="1">
                 <a:solidFill>
                   <a:srgbClr val="1A1A1A"/>
@@ -3369,6 +3988,7 @@
           </a:p>
           <a:p xmlns:a="http://schemas.openxmlformats.org/drawingml/2006/main">
             <a:pPr algn="ctr">
+              <a:buNone/>
               <a:defRPr sz="1275" b="1">
                 <a:solidFill>
                   <a:srgbClr val="1A1A1A"/>
@@ -3426,6 +4046,7 @@
           <a:lstStyle xmlns:a="http://schemas.openxmlformats.org/drawingml/2006/main"/>
           <a:p xmlns:a="http://schemas.openxmlformats.org/drawingml/2006/main">
             <a:pPr algn="ctr">
+              <a:buNone/>
               <a:defRPr sz="1350" b="0">
                 <a:solidFill>
                   <a:srgbClr val="1F4E79"/>
@@ -3488,6 +4109,7 @@
           <a:lstStyle xmlns:a="http://schemas.openxmlformats.org/drawingml/2006/main"/>
           <a:p xmlns:a="http://schemas.openxmlformats.org/drawingml/2006/main">
             <a:pPr algn="ctr">
+              <a:buNone/>
               <a:defRPr sz="1275" b="1">
                 <a:solidFill>
                   <a:srgbClr val="1A1A1A"/>
@@ -3511,6 +4133,7 @@
           </a:p>
           <a:p xmlns:a="http://schemas.openxmlformats.org/drawingml/2006/main">
             <a:pPr algn="ctr">
+              <a:buNone/>
               <a:defRPr sz="1275" b="1">
                 <a:solidFill>
                   <a:srgbClr val="1A1A1A"/>
@@ -3568,6 +4191,7 @@
           <a:lstStyle xmlns:a="http://schemas.openxmlformats.org/drawingml/2006/main"/>
           <a:p xmlns:a="http://schemas.openxmlformats.org/drawingml/2006/main">
             <a:pPr algn="ctr">
+              <a:buNone/>
               <a:defRPr sz="1350" b="0">
                 <a:solidFill>
                   <a:srgbClr val="1F4E79"/>
@@ -3630,6 +4254,7 @@
           <a:lstStyle xmlns:a="http://schemas.openxmlformats.org/drawingml/2006/main"/>
           <a:p xmlns:a="http://schemas.openxmlformats.org/drawingml/2006/main">
             <a:pPr algn="ctr">
+              <a:buNone/>
               <a:defRPr sz="1275" b="1">
                 <a:solidFill>
                   <a:srgbClr val="1A1A1A"/>
@@ -3653,6 +4278,7 @@
           </a:p>
           <a:p xmlns:a="http://schemas.openxmlformats.org/drawingml/2006/main">
             <a:pPr algn="ctr">
+              <a:buNone/>
               <a:defRPr sz="1275" b="1">
                 <a:solidFill>
                   <a:srgbClr val="1A1A1A"/>
@@ -3710,6 +4336,7 @@
           <a:lstStyle xmlns:a="http://schemas.openxmlformats.org/drawingml/2006/main"/>
           <a:p xmlns:a="http://schemas.openxmlformats.org/drawingml/2006/main">
             <a:pPr algn="ctr">
+              <a:buNone/>
               <a:defRPr sz="1350" b="0">
                 <a:solidFill>
                   <a:srgbClr val="1F4E79"/>
@@ -3772,6 +4399,7 @@
           <a:lstStyle xmlns:a="http://schemas.openxmlformats.org/drawingml/2006/main"/>
           <a:p xmlns:a="http://schemas.openxmlformats.org/drawingml/2006/main">
             <a:pPr algn="ctr">
+              <a:buNone/>
               <a:defRPr sz="1275" b="1">
                 <a:solidFill>
                   <a:srgbClr val="1A1A1A"/>
@@ -3795,6 +4423,7 @@
           </a:p>
           <a:p xmlns:a="http://schemas.openxmlformats.org/drawingml/2006/main">
             <a:pPr algn="ctr">
+              <a:buNone/>
               <a:defRPr sz="1275" b="1">
                 <a:solidFill>
                   <a:srgbClr val="1A1A1A"/>
@@ -3852,6 +4481,7 @@
           <a:lstStyle xmlns:a="http://schemas.openxmlformats.org/drawingml/2006/main"/>
           <a:p xmlns:a="http://schemas.openxmlformats.org/drawingml/2006/main">
             <a:pPr algn="ctr">
+              <a:buNone/>
               <a:defRPr sz="1350" b="0">
                 <a:solidFill>
                   <a:srgbClr val="1F4E79"/>
@@ -3914,6 +4544,7 @@
           <a:lstStyle xmlns:a="http://schemas.openxmlformats.org/drawingml/2006/main"/>
           <a:p xmlns:a="http://schemas.openxmlformats.org/drawingml/2006/main">
             <a:pPr algn="ctr">
+              <a:buNone/>
               <a:defRPr sz="1275" b="1">
                 <a:solidFill>
                   <a:srgbClr val="1A1A1A"/>
@@ -3937,6 +4568,7 @@
           </a:p>
           <a:p xmlns:a="http://schemas.openxmlformats.org/drawingml/2006/main">
             <a:pPr algn="ctr">
+              <a:buNone/>
               <a:defRPr sz="1275" b="1">
                 <a:solidFill>
                   <a:srgbClr val="1A1A1A"/>
@@ -3994,6 +4626,7 @@
           <a:lstStyle xmlns:a="http://schemas.openxmlformats.org/drawingml/2006/main"/>
           <a:p xmlns:a="http://schemas.openxmlformats.org/drawingml/2006/main">
             <a:pPr algn="ctr">
+              <a:buNone/>
               <a:defRPr sz="1350" b="0">
                 <a:solidFill>
                   <a:srgbClr val="1F4E79"/>
@@ -4056,6 +4689,7 @@
           <a:lstStyle xmlns:a="http://schemas.openxmlformats.org/drawingml/2006/main"/>
           <a:p xmlns:a="http://schemas.openxmlformats.org/drawingml/2006/main">
             <a:pPr algn="ctr">
+              <a:buNone/>
               <a:defRPr sz="1275" b="1">
                 <a:solidFill>
                   <a:srgbClr val="1A1A1A"/>
@@ -4079,6 +4713,7 @@
           </a:p>
           <a:p xmlns:a="http://schemas.openxmlformats.org/drawingml/2006/main">
             <a:pPr algn="ctr">
+              <a:buNone/>
               <a:defRPr sz="1275" b="1">
                 <a:solidFill>
                   <a:srgbClr val="1A1A1A"/>
@@ -4136,6 +4771,7 @@
           <a:lstStyle xmlns:a="http://schemas.openxmlformats.org/drawingml/2006/main"/>
           <a:p xmlns:a="http://schemas.openxmlformats.org/drawingml/2006/main">
             <a:pPr algn="l">
+              <a:buNone/>
               <a:defRPr sz="1425" b="0">
                 <a:solidFill>
                   <a:srgbClr val="1A1A1A"/>
@@ -4193,6 +4829,7 @@
           <a:lstStyle xmlns:a="http://schemas.openxmlformats.org/drawingml/2006/main"/>
           <a:p xmlns:a="http://schemas.openxmlformats.org/drawingml/2006/main">
             <a:pPr algn="l">
+              <a:buNone/>
               <a:defRPr sz="1425" b="0">
                 <a:solidFill>
                   <a:srgbClr val="595959"/>
@@ -4272,6 +4909,7 @@
           <a:lstStyle xmlns:a="http://schemas.openxmlformats.org/drawingml/2006/main"/>
           <a:p xmlns:a="http://schemas.openxmlformats.org/drawingml/2006/main">
             <a:pPr algn="l">
+              <a:buNone/>
               <a:defRPr sz="2400" b="1">
                 <a:solidFill>
                   <a:srgbClr val="1F4E79"/>
@@ -4297,7 +4935,7 @@
       </p:sp>
       <p:graphicFrame>
         <p:nvGraphicFramePr>
-          <p:cNvPr id="7" name=""/>
+          <p:cNvPr id="9" name=""/>
           <p:cNvGraphicFramePr/>
           <p:nvPr/>
         </p:nvGraphicFramePr>
@@ -5018,6 +5656,7 @@
           <a:lstStyle xmlns:a="http://schemas.openxmlformats.org/drawingml/2006/main"/>
           <a:p xmlns:a="http://schemas.openxmlformats.org/drawingml/2006/main">
             <a:pPr algn="l">
+              <a:buNone/>
               <a:defRPr sz="3000" b="1">
                 <a:solidFill>
                   <a:srgbClr val="1F4E79"/>
@@ -5075,6 +5714,7 @@
           <a:lstStyle xmlns:a="http://schemas.openxmlformats.org/drawingml/2006/main"/>
           <a:p xmlns:a="http://schemas.openxmlformats.org/drawingml/2006/main">
             <a:pPr algn="l">
+              <a:buNone/>
               <a:defRPr sz="1425" b="0">
                 <a:solidFill>
                   <a:srgbClr val="1A1A1A"/>
@@ -5132,6 +5772,7 @@
           <a:lstStyle xmlns:a="http://schemas.openxmlformats.org/drawingml/2006/main"/>
           <a:p xmlns:a="http://schemas.openxmlformats.org/drawingml/2006/main">
             <a:pPr algn="l">
+              <a:buNone/>
               <a:defRPr sz="1425" b="0">
                 <a:solidFill>
                   <a:srgbClr val="595959"/>
@@ -5211,6 +5852,7 @@
           <a:lstStyle xmlns:a="http://schemas.openxmlformats.org/drawingml/2006/main"/>
           <a:p xmlns:a="http://schemas.openxmlformats.org/drawingml/2006/main">
             <a:pPr algn="l">
+              <a:buNone/>
               <a:defRPr sz="2400" b="1">
                 <a:solidFill>
                   <a:srgbClr val="1F4E79"/>
@@ -5268,6 +5910,7 @@
           <a:lstStyle xmlns:a="http://schemas.openxmlformats.org/drawingml/2006/main"/>
           <a:p xmlns:a="http://schemas.openxmlformats.org/drawingml/2006/main">
             <a:pPr algn="l">
+              <a:buNone/>
               <a:defRPr sz="1500" b="1">
                 <a:solidFill>
                   <a:srgbClr val="1F4E79"/>
@@ -5293,7 +5936,7 @@
       </p:sp>
       <p:graphicFrame>
         <p:nvGraphicFramePr>
-          <p:cNvPr id="9" name=""/>
+          <p:cNvPr id="11" name=""/>
           <p:cNvGraphicFramePr/>
           <p:nvPr/>
         </p:nvGraphicFramePr>
@@ -5789,6 +6432,7 @@
           <a:lstStyle xmlns:a="http://schemas.openxmlformats.org/drawingml/2006/main"/>
           <a:p xmlns:a="http://schemas.openxmlformats.org/drawingml/2006/main">
             <a:pPr algn="l">
+              <a:buNone/>
               <a:defRPr sz="1350" b="0">
                 <a:solidFill>
                   <a:srgbClr val="1A1A1A"/>
@@ -5846,6 +6490,7 @@
           <a:lstStyle xmlns:a="http://schemas.openxmlformats.org/drawingml/2006/main"/>
           <a:p xmlns:a="http://schemas.openxmlformats.org/drawingml/2006/main">
             <a:pPr algn="l">
+              <a:buNone/>
               <a:defRPr sz="1500" b="1">
                 <a:solidFill>
                   <a:srgbClr val="1F4E79"/>
@@ -5903,6 +6548,7 @@
           <a:lstStyle xmlns:a="http://schemas.openxmlformats.org/drawingml/2006/main"/>
           <a:p xmlns:a="http://schemas.openxmlformats.org/drawingml/2006/main">
             <a:pPr algn="l">
+              <a:buNone/>
               <a:defRPr sz="1350" b="0">
                 <a:solidFill>
                   <a:srgbClr val="1A1A1A"/>
@@ -5931,6 +6577,7 @@
           </a:p>
           <a:p xmlns:a="http://schemas.openxmlformats.org/drawingml/2006/main">
             <a:pPr algn="l">
+              <a:buNone/>
               <a:defRPr sz="1350" b="0">
                 <a:solidFill>
                   <a:srgbClr val="1A1A1A"/>
@@ -5959,6 +6606,7 @@
           </a:p>
           <a:p xmlns:a="http://schemas.openxmlformats.org/drawingml/2006/main">
             <a:pPr algn="l">
+              <a:buNone/>
               <a:defRPr sz="1350" b="0">
                 <a:solidFill>
                   <a:srgbClr val="1A1A1A"/>
@@ -6038,6 +6686,7 @@
           <a:lstStyle xmlns:a="http://schemas.openxmlformats.org/drawingml/2006/main"/>
           <a:p xmlns:a="http://schemas.openxmlformats.org/drawingml/2006/main">
             <a:pPr algn="l">
+              <a:buNone/>
               <a:defRPr sz="2400" b="1">
                 <a:solidFill>
                   <a:srgbClr val="1F4E79"/>
@@ -6095,6 +6744,7 @@
           <a:lstStyle xmlns:a="http://schemas.openxmlformats.org/drawingml/2006/main"/>
           <a:p xmlns:a="http://schemas.openxmlformats.org/drawingml/2006/main">
             <a:pPr algn="l">
+              <a:buNone/>
               <a:defRPr sz="1425" b="0">
                 <a:solidFill>
                   <a:srgbClr val="1A1A1A"/>
@@ -6120,7 +6770,7 @@
       </p:sp>
       <p:graphicFrame>
         <p:nvGraphicFramePr>
-          <p:cNvPr id="8" name=""/>
+          <p:cNvPr id="11" name=""/>
           <p:cNvGraphicFramePr/>
           <p:nvPr/>
         </p:nvGraphicFramePr>
@@ -6471,6 +7121,7 @@
           <a:lstStyle xmlns:a="http://schemas.openxmlformats.org/drawingml/2006/main"/>
           <a:p xmlns:a="http://schemas.openxmlformats.org/drawingml/2006/main">
             <a:pPr algn="l">
+              <a:buNone/>
               <a:defRPr sz="1350" b="0">
                 <a:solidFill>
                   <a:srgbClr val="595959"/>
@@ -6496,14 +7147,14 @@
       </p:sp>
       <p:pic>
         <p:nvPicPr>
-          <p:cNvPr id="10" name=""/>
+          <p:cNvPr id="13" name=""/>
           <p:cNvPicPr>
             <a:picLocks xmlns:a="http://schemas.openxmlformats.org/drawingml/2006/main" noChangeAspect="1"/>
           </p:cNvPicPr>
           <p:nvPr/>
         </p:nvPicPr>
         <p:blipFill>
-          <a:blip xmlns:r="http://schemas.openxmlformats.org/officeDocument/2006/relationships" xmlns:a="http://schemas.openxmlformats.org/drawingml/2006/main" r:embed="Rc31600724a454324"/>
+          <a:blip xmlns:r="http://schemas.openxmlformats.org/officeDocument/2006/relationships" xmlns:a="http://schemas.openxmlformats.org/drawingml/2006/main" r:embed="R991d2a37a91c4d05"/>
           <a:stretch xmlns:a="http://schemas.openxmlformats.org/drawingml/2006/main"/>
         </p:blipFill>
         <p:spPr>
@@ -6572,6 +7223,7 @@
           <a:lstStyle xmlns:a="http://schemas.openxmlformats.org/drawingml/2006/main"/>
           <a:p xmlns:a="http://schemas.openxmlformats.org/drawingml/2006/main">
             <a:pPr algn="l">
+              <a:buNone/>
               <a:defRPr sz="2400" b="1">
                 <a:solidFill>
                   <a:srgbClr val="1F4E79"/>
@@ -6597,14 +7249,14 @@
       </p:sp>
       <p:pic>
         <p:nvPicPr>
-          <p:cNvPr id="5" name=""/>
+          <p:cNvPr id="7" name=""/>
           <p:cNvPicPr>
             <a:picLocks xmlns:a="http://schemas.openxmlformats.org/drawingml/2006/main" noChangeAspect="1"/>
           </p:cNvPicPr>
           <p:nvPr/>
         </p:nvPicPr>
         <p:blipFill>
-          <a:blip xmlns:r="http://schemas.openxmlformats.org/officeDocument/2006/relationships" xmlns:a="http://schemas.openxmlformats.org/drawingml/2006/main" r:embed="Rd42e18795a764c97"/>
+          <a:blip xmlns:r="http://schemas.openxmlformats.org/officeDocument/2006/relationships" xmlns:a="http://schemas.openxmlformats.org/drawingml/2006/main" r:embed="R2e3108a1ed754117"/>
           <a:stretch xmlns:a="http://schemas.openxmlformats.org/drawingml/2006/main"/>
         </p:blipFill>
         <p:spPr>
@@ -6651,6 +7303,7 @@
           <a:lstStyle xmlns:a="http://schemas.openxmlformats.org/drawingml/2006/main"/>
           <a:p xmlns:a="http://schemas.openxmlformats.org/drawingml/2006/main">
             <a:pPr algn="l">
+              <a:buNone/>
               <a:defRPr sz="1425" b="0">
                 <a:solidFill>
                   <a:srgbClr val="1A1A1A"/>
@@ -6730,6 +7383,7 @@
           <a:lstStyle xmlns:a="http://schemas.openxmlformats.org/drawingml/2006/main"/>
           <a:p xmlns:a="http://schemas.openxmlformats.org/drawingml/2006/main">
             <a:pPr algn="l">
+              <a:buNone/>
               <a:defRPr sz="2400" b="1">
                 <a:solidFill>
                   <a:srgbClr val="1F4E79"/>
@@ -6755,7 +7409,7 @@
       </p:sp>
       <p:graphicFrame>
         <p:nvGraphicFramePr>
-          <p:cNvPr id="5" name=""/>
+          <p:cNvPr id="7" name=""/>
           <p:cNvGraphicFramePr/>
           <p:nvPr/>
         </p:nvGraphicFramePr>
@@ -7301,6 +7955,7 @@
           <a:lstStyle xmlns:a="http://schemas.openxmlformats.org/drawingml/2006/main"/>
           <a:p xmlns:a="http://schemas.openxmlformats.org/drawingml/2006/main">
             <a:pPr algn="l">
+              <a:buNone/>
               <a:defRPr sz="1425" b="0">
                 <a:solidFill>
                   <a:srgbClr val="1A1A1A"/>

--- a/doc/Attention加速器IP汇报.pptx
+++ b/doc/Attention加速器IP汇报.pptx
@@ -2,23 +2,23 @@
 <file path=ppt/presentation.xml><?xml version="1.0" encoding="utf-8"?>
 <p:presentation xmlns:p="http://schemas.openxmlformats.org/presentationml/2006/main">
   <p:sldMasterIdLst>
-    <p:sldMasterId xmlns:r="http://schemas.openxmlformats.org/officeDocument/2006/relationships" id="2147483648" r:id="R76eab61f2f634250"/>
+    <p:sldMasterId xmlns:r="http://schemas.openxmlformats.org/officeDocument/2006/relationships" id="2147483648" r:id="R3328f229ad3446b9"/>
   </p:sldMasterIdLst>
   <p:notesMasterIdLst>
-    <p:notesMasterId xmlns:r="http://schemas.openxmlformats.org/officeDocument/2006/relationships" r:id="R1ef86ccab2784eb7"/>
+    <p:notesMasterId xmlns:r="http://schemas.openxmlformats.org/officeDocument/2006/relationships" r:id="R026582c87e6d494a"/>
   </p:notesMasterIdLst>
   <p:sldIdLst>
-    <p:sldId xmlns:r="http://schemas.openxmlformats.org/officeDocument/2006/relationships" id="256" r:id="R005a2c94d68548cc"/>
-    <p:sldId xmlns:r="http://schemas.openxmlformats.org/officeDocument/2006/relationships" id="257" r:id="R3c7b42fbfec64ab5"/>
-    <p:sldId xmlns:r="http://schemas.openxmlformats.org/officeDocument/2006/relationships" id="258" r:id="R8d32fec5b80d421b"/>
-    <p:sldId xmlns:r="http://schemas.openxmlformats.org/officeDocument/2006/relationships" id="259" r:id="Rc793067cdd844af3"/>
-    <p:sldId xmlns:r="http://schemas.openxmlformats.org/officeDocument/2006/relationships" id="260" r:id="Rf93e6d35d5e1489e"/>
-    <p:sldId xmlns:r="http://schemas.openxmlformats.org/officeDocument/2006/relationships" id="261" r:id="R22e88da6062041a8"/>
-    <p:sldId xmlns:r="http://schemas.openxmlformats.org/officeDocument/2006/relationships" id="262" r:id="Rb930d942f3aa4bee"/>
-    <p:sldId xmlns:r="http://schemas.openxmlformats.org/officeDocument/2006/relationships" id="263" r:id="R1ec7e777db8d4a66"/>
-    <p:sldId xmlns:r="http://schemas.openxmlformats.org/officeDocument/2006/relationships" id="264" r:id="Re6959ed93c57479c"/>
-    <p:sldId xmlns:r="http://schemas.openxmlformats.org/officeDocument/2006/relationships" id="265" r:id="R089aa81bb6dd4a41"/>
-    <p:sldId xmlns:r="http://schemas.openxmlformats.org/officeDocument/2006/relationships" id="266" r:id="R23ce1638c5a9489d"/>
+    <p:sldId xmlns:r="http://schemas.openxmlformats.org/officeDocument/2006/relationships" id="256" r:id="Rb9b337599b2b4fdc"/>
+    <p:sldId xmlns:r="http://schemas.openxmlformats.org/officeDocument/2006/relationships" id="257" r:id="Ra60321fb781a4764"/>
+    <p:sldId xmlns:r="http://schemas.openxmlformats.org/officeDocument/2006/relationships" id="258" r:id="Rb95ab9e6ac964f10"/>
+    <p:sldId xmlns:r="http://schemas.openxmlformats.org/officeDocument/2006/relationships" id="259" r:id="R4962307f1f324a50"/>
+    <p:sldId xmlns:r="http://schemas.openxmlformats.org/officeDocument/2006/relationships" id="260" r:id="Rb3ffecfc9ce24f4e"/>
+    <p:sldId xmlns:r="http://schemas.openxmlformats.org/officeDocument/2006/relationships" id="261" r:id="R1356db56a2994e8b"/>
+    <p:sldId xmlns:r="http://schemas.openxmlformats.org/officeDocument/2006/relationships" id="262" r:id="R53f17f708e0344f5"/>
+    <p:sldId xmlns:r="http://schemas.openxmlformats.org/officeDocument/2006/relationships" id="263" r:id="Red74874267e94c1b"/>
+    <p:sldId xmlns:r="http://schemas.openxmlformats.org/officeDocument/2006/relationships" id="264" r:id="R7f10bb1538ae4a6c"/>
+    <p:sldId xmlns:r="http://schemas.openxmlformats.org/officeDocument/2006/relationships" id="265" r:id="Ra17c046804ec4341"/>
+    <p:sldId xmlns:r="http://schemas.openxmlformats.org/officeDocument/2006/relationships" id="266" r:id="Rd47bd6a7ea674352"/>
   </p:sldIdLst>
   <p:sldSz cx="12192000" cy="6858000"/>
   <p:notesSz cx="6858000" cy="9144000"/>
@@ -1220,7 +1220,7 @@
   </p:cSld>
   <p:clrMap bg1="lt1" tx1="dk1" bg2="lt2" tx2="dk2" accent1="accent1" accent2="accent2" accent3="accent3" accent4="accent4" accent5="accent5" accent6="accent6" hlink="hlink" folHlink="folHlink"/>
   <p:sldLayoutIdLst>
-    <p:sldLayoutId xmlns:r="http://schemas.openxmlformats.org/officeDocument/2006/relationships" id="2147483649" r:id="R30dbba340c364111"/>
+    <p:sldLayoutId xmlns:r="http://schemas.openxmlformats.org/officeDocument/2006/relationships" id="2147483649" r:id="Rc040bc769a324033"/>
   </p:sldLayoutIdLst>
   <p:txStyles>
     <p:titleStyle>
@@ -2073,7 +2073,7 @@
                 <a:ea typeface="Microsoft YaHei"/>
                 <a:cs typeface="Microsoft YaHei"/>
               </a:rPr>
-              <a:t>点积改 4 路并行或边装载边计算：装载与点积时间可压缩一半以上，代价是 4 个乘法器</a:t>
+              <a:t>点积已支持 4 路并行（加分项 B，见下一页）：169 → 145 拍，代价 +3 个 8×8 乘法器</a:t>
             </a:r>
           </a:p>
           <a:p xmlns:a="http://schemas.openxmlformats.org/drawingml/2006/main">
@@ -2298,6 +2298,7 @@
           <a:lstStyle xmlns:a="http://schemas.openxmlformats.org/drawingml/2006/main"/>
           <a:p xmlns:a="http://schemas.openxmlformats.org/drawingml/2006/main">
             <a:pPr algn="l">
+              <a:buNone/>
               <a:defRPr sz="2400" b="1">
                 <a:solidFill>
                   <a:srgbClr val="1F4E79"/>
@@ -2323,7 +2324,7 @@
       </p:sp>
       <p:graphicFrame>
         <p:nvGraphicFramePr>
-          <p:cNvPr id="6" name=""/>
+          <p:cNvPr id="8" name=""/>
           <p:cNvGraphicFramePr/>
           <p:nvPr/>
         </p:nvGraphicFramePr>
@@ -2674,6 +2675,7 @@
           <a:lstStyle xmlns:a="http://schemas.openxmlformats.org/drawingml/2006/main"/>
           <a:p xmlns:a="http://schemas.openxmlformats.org/drawingml/2006/main">
             <a:pPr algn="l">
+              <a:buNone/>
               <a:defRPr sz="1350" b="0">
                 <a:solidFill>
                   <a:srgbClr val="1A1A1A"/>
@@ -2731,6 +2733,7 @@
           <a:lstStyle xmlns:a="http://schemas.openxmlformats.org/drawingml/2006/main"/>
           <a:p xmlns:a="http://schemas.openxmlformats.org/drawingml/2006/main">
             <a:pPr algn="l">
+              <a:buNone/>
               <a:defRPr sz="1200" b="0">
                 <a:solidFill>
                   <a:srgbClr val="595959"/>
@@ -7154,7 +7157,7 @@
           <p:nvPr/>
         </p:nvPicPr>
         <p:blipFill>
-          <a:blip xmlns:r="http://schemas.openxmlformats.org/officeDocument/2006/relationships" xmlns:a="http://schemas.openxmlformats.org/drawingml/2006/main" r:embed="R991d2a37a91c4d05"/>
+          <a:blip xmlns:r="http://schemas.openxmlformats.org/officeDocument/2006/relationships" xmlns:a="http://schemas.openxmlformats.org/drawingml/2006/main" r:embed="Ra8e2e32953014880"/>
           <a:stretch xmlns:a="http://schemas.openxmlformats.org/drawingml/2006/main"/>
         </p:blipFill>
         <p:spPr>
@@ -7256,7 +7259,7 @@
           <p:nvPr/>
         </p:nvPicPr>
         <p:blipFill>
-          <a:blip xmlns:r="http://schemas.openxmlformats.org/officeDocument/2006/relationships" xmlns:a="http://schemas.openxmlformats.org/drawingml/2006/main" r:embed="R2e3108a1ed754117"/>
+          <a:blip xmlns:r="http://schemas.openxmlformats.org/officeDocument/2006/relationships" xmlns:a="http://schemas.openxmlformats.org/drawingml/2006/main" r:embed="Rbd186887a30d4b6c"/>
           <a:stretch xmlns:a="http://schemas.openxmlformats.org/drawingml/2006/main"/>
         </p:blipFill>
         <p:spPr>
